--- a/ppt/IoT30-ESPTool.pptx
+++ b/ppt/IoT30-ESPTool.pptx
@@ -3840,7 +3840,7 @@
             </a:r>
             <a:r>
               <a:rPr lang="fr-FR" dirty="0" err="1"/>
-              <a:t>esptools</a:t>
+              <a:t>esptool</a:t>
             </a:r>
             <a:endParaRPr lang="fr-FR" dirty="0"/>
           </a:p>
@@ -3962,12 +3962,16 @@
           <a:p>
             <a:pPr lvl="1"/>
             <a:r>
+              <a:rPr lang="en-US" dirty="0"/>
+              <a:t>python –m </a:t>
+            </a:r>
+            <a:r>
               <a:rPr lang="en-US"/>
-              <a:t>python –m </a:t>
+              <a:t>esptool </a:t>
             </a:r>
             <a:r>
               <a:rPr lang="en-US" dirty="0"/>
-              <a:t>esptool.py -p COM5 -b 460800 read-flash 0 ALL </a:t>
+              <a:t>-p COM5 -b 460800 read-flash 0 ALL </a:t>
             </a:r>
             <a:r>
               <a:rPr lang="en-US" dirty="0" err="1"/>
@@ -4701,15 +4705,7 @@
             </a:r>
             <a:r>
               <a:rPr lang="fr-FR" dirty="0"/>
-              <a:t> de </a:t>
-            </a:r>
-            <a:r>
-              <a:rPr lang="fr-FR" dirty="0" err="1"/>
-              <a:t>protoypage</a:t>
-            </a:r>
-            <a:r>
-              <a:rPr lang="fr-FR" dirty="0"/>
-              <a:t> à souder</a:t>
+              <a:t> de prototypage à souder</a:t>
             </a:r>
           </a:p>
           <a:p>
